--- a/docs/samples/经营汇报.pptx
+++ b/docs/samples/经营汇报.pptx
@@ -3013,7 +3013,7 @@
           </a:bodyPr>
           <a:lstStyle/>
           <a:p>
-            <a:pPr marL="228600" indent="-228600">
+            <a:pPr marL="330200" indent="-330200">
               <a:lnSpc>
                 <a:spcPct val="115000"/>
               </a:lnSpc>
@@ -3034,12 +3034,12 @@
             <a:endParaRPr lang="en-US" sz="2200" dirty="0"/>
           </a:p>
           <a:p>
-            <a:pPr marL="228600" indent="-228600">
+            <a:pPr marL="330200" indent="-330200">
               <a:lnSpc>
                 <a:spcPct val="115000"/>
               </a:lnSpc>
               <a:spcBef>
-                <a:spcPts val="800"/>
+                <a:spcPts val="1300"/>
               </a:spcBef>
               <a:buSzPct val="100000"/>
               <a:buChar char="■"/>
@@ -3058,12 +3058,12 @@
             <a:endParaRPr lang="en-US" sz="2200" dirty="0"/>
           </a:p>
           <a:p>
-            <a:pPr marL="228600" indent="-228600">
+            <a:pPr marL="330200" indent="-330200">
               <a:lnSpc>
                 <a:spcPct val="115000"/>
               </a:lnSpc>
               <a:spcBef>
-                <a:spcPts val="800"/>
+                <a:spcPts val="1300"/>
               </a:spcBef>
               <a:buSzPct val="100000"/>
               <a:buChar char="■"/>
@@ -3082,7 +3082,7 @@
             <a:endParaRPr lang="en-US" sz="2200" dirty="0"/>
           </a:p>
           <a:p>
-            <a:pPr lvl="1" marL="457200" indent="-228600">
+            <a:pPr lvl="1" marL="660400" indent="-330200">
               <a:lnSpc>
                 <a:spcPct val="115000"/>
               </a:lnSpc>
@@ -3435,7 +3435,7 @@
         <p:spPr>
           <a:xfrm>
             <a:off x="548640" y="2194560"/>
-            <a:ext cx="5410048" cy="4023360"/>
+            <a:ext cx="5410048" cy="1591056"/>
           </a:xfrm>
           <a:prstGeom prst="rect">
             <a:avLst/>
@@ -3446,15 +3446,15 @@
           <a:ln/>
         </p:spPr>
         <p:txBody>
-          <a:bodyPr wrap="square" lIns="152400" tIns="152400" rIns="152400" bIns="152400" rtlCol="0" anchor="t"/>
+          <a:bodyPr wrap="square" lIns="177800" tIns="177800" rIns="177800" bIns="177800" rtlCol="0" anchor="t"/>
           <a:lstStyle/>
           <a:p>
-            <a:pPr marL="228600" indent="-228600">
+            <a:pPr marL="330200" indent="-330200">
               <a:buSzPct val="100000"/>
               <a:buChar char="■"/>
             </a:pPr>
             <a:r>
-              <a:rPr lang="en-US" sz="1800" dirty="0">
+              <a:rPr lang="en-US" sz="2000" dirty="0">
                 <a:solidFill>
                   <a:srgbClr val="1F2328"/>
                 </a:solidFill>
@@ -3464,18 +3464,18 @@
               </a:rPr>
               <a:t>可控性强，客户关系留在公司</a:t>
             </a:r>
-            <a:endParaRPr lang="en-US" sz="1800" dirty="0"/>
-          </a:p>
-          <a:p>
-            <a:pPr marL="228600" indent="-228600">
+            <a:endParaRPr lang="en-US" sz="2000" dirty="0"/>
+          </a:p>
+          <a:p>
+            <a:pPr marL="330200" indent="-330200">
               <a:spcBef>
-                <a:spcPts val="800"/>
+                <a:spcPts val="1200"/>
               </a:spcBef>
               <a:buSzPct val="100000"/>
               <a:buChar char="■"/>
             </a:pPr>
             <a:r>
-              <a:rPr lang="en-US" sz="1800" dirty="0">
+              <a:rPr lang="en-US" sz="2000" dirty="0">
                 <a:solidFill>
                   <a:srgbClr val="1F2328"/>
                 </a:solidFill>
@@ -3485,7 +3485,7 @@
               </a:rPr>
               <a:t>人员成本每季度约 60 万元</a:t>
             </a:r>
-            <a:endParaRPr lang="en-US" sz="1800" dirty="0"/>
+            <a:endParaRPr lang="en-US" sz="2000" dirty="0"/>
           </a:p>
         </p:txBody>
       </p:sp>
@@ -3562,7 +3562,7 @@
         <p:spPr>
           <a:xfrm>
             <a:off x="6233008" y="2194560"/>
-            <a:ext cx="5410048" cy="4023360"/>
+            <a:ext cx="5410048" cy="1591056"/>
           </a:xfrm>
           <a:prstGeom prst="rect">
             <a:avLst/>
@@ -3573,15 +3573,15 @@
           <a:ln/>
         </p:spPr>
         <p:txBody>
-          <a:bodyPr wrap="square" lIns="152400" tIns="152400" rIns="152400" bIns="152400" rtlCol="0" anchor="t"/>
+          <a:bodyPr wrap="square" lIns="177800" tIns="177800" rIns="177800" bIns="177800" rtlCol="0" anchor="t"/>
           <a:lstStyle/>
           <a:p>
-            <a:pPr marL="228600" indent="-228600">
+            <a:pPr marL="330200" indent="-330200">
               <a:buSzPct val="100000"/>
               <a:buChar char="■"/>
             </a:pPr>
             <a:r>
-              <a:rPr lang="en-US" sz="1800" dirty="0">
+              <a:rPr lang="en-US" sz="2000" dirty="0">
                 <a:solidFill>
                   <a:srgbClr val="1F2328"/>
                 </a:solidFill>
@@ -3591,18 +3591,18 @@
               </a:rPr>
               <a:t>上线快，覆盖面广</a:t>
             </a:r>
-            <a:endParaRPr lang="en-US" sz="1800" dirty="0"/>
-          </a:p>
-          <a:p>
-            <a:pPr marL="228600" indent="-228600">
+            <a:endParaRPr lang="en-US" sz="2000" dirty="0"/>
+          </a:p>
+          <a:p>
+            <a:pPr marL="330200" indent="-330200">
               <a:spcBef>
-                <a:spcPts val="800"/>
+                <a:spcPts val="1200"/>
               </a:spcBef>
               <a:buSzPct val="100000"/>
               <a:buChar char="■"/>
             </a:pPr>
             <a:r>
-              <a:rPr lang="en-US" sz="1800" dirty="0">
+              <a:rPr lang="en-US" sz="2000" dirty="0">
                 <a:solidFill>
                   <a:srgbClr val="1F2328"/>
                 </a:solidFill>
@@ -3612,7 +3612,7 @@
               </a:rPr>
               <a:t>毛利让渡约 15%</a:t>
             </a:r>
-            <a:endParaRPr lang="en-US" sz="1800" dirty="0"/>
+            <a:endParaRPr lang="en-US" sz="2000" dirty="0"/>
           </a:p>
         </p:txBody>
       </p:sp>
@@ -3804,7 +3804,7 @@
                 <a:gridCol w="2773604"/>
                 <a:gridCol w="2773604"/>
               </a:tblGrid>
-              <a:tr h="0">
+              <a:tr h="566928">
                 <a:tc>
                   <a:txBody>
                     <a:bodyPr/>
@@ -3814,7 +3814,7 @@
                         <a:buNone/>
                       </a:pPr>
                       <a:r>
-                        <a:rPr lang="en-US" sz="1500" b="1" dirty="0">
+                        <a:rPr lang="en-US" sz="1600" b="1" dirty="0">
                           <a:solidFill>
                             <a:srgbClr val="FFFFFF"/>
                           </a:solidFill>
@@ -3824,7 +3824,7 @@
                         </a:rPr>
                         <a:t>工作事项</a:t>
                       </a:r>
-                      <a:endParaRPr lang="en-US" sz="1500" dirty="0">
+                      <a:endParaRPr lang="en-US" sz="1600" dirty="0">
                         <a:latin typeface="微软雅黑" charset="0"/>
                         <a:ea typeface="微软雅黑" charset="0"/>
                         <a:cs typeface="微软雅黑" charset="0"/>
@@ -3882,7 +3882,7 @@
                         <a:buNone/>
                       </a:pPr>
                       <a:r>
-                        <a:rPr lang="en-US" sz="1500" b="1" dirty="0">
+                        <a:rPr lang="en-US" sz="1600" b="1" dirty="0">
                           <a:solidFill>
                             <a:srgbClr val="FFFFFF"/>
                           </a:solidFill>
@@ -3892,7 +3892,7 @@
                         </a:rPr>
                         <a:t>目标</a:t>
                       </a:r>
-                      <a:endParaRPr lang="en-US" sz="1500" dirty="0">
+                      <a:endParaRPr lang="en-US" sz="1600" dirty="0">
                         <a:latin typeface="微软雅黑" charset="0"/>
                         <a:ea typeface="微软雅黑" charset="0"/>
                         <a:cs typeface="微软雅黑" charset="0"/>
@@ -3950,7 +3950,7 @@
                         <a:buNone/>
                       </a:pPr>
                       <a:r>
-                        <a:rPr lang="en-US" sz="1500" b="1" dirty="0">
+                        <a:rPr lang="en-US" sz="1600" b="1" dirty="0">
                           <a:solidFill>
                             <a:srgbClr val="FFFFFF"/>
                           </a:solidFill>
@@ -3960,7 +3960,7 @@
                         </a:rPr>
                         <a:t>负责人</a:t>
                       </a:r>
-                      <a:endParaRPr lang="en-US" sz="1500" dirty="0">
+                      <a:endParaRPr lang="en-US" sz="1600" dirty="0">
                         <a:latin typeface="微软雅黑" charset="0"/>
                         <a:ea typeface="微软雅黑" charset="0"/>
                         <a:cs typeface="微软雅黑" charset="0"/>
@@ -4018,7 +4018,7 @@
                         <a:buNone/>
                       </a:pPr>
                       <a:r>
-                        <a:rPr lang="en-US" sz="1500" b="1" dirty="0">
+                        <a:rPr lang="en-US" sz="1600" b="1" dirty="0">
                           <a:solidFill>
                             <a:srgbClr val="FFFFFF"/>
                           </a:solidFill>
@@ -4028,7 +4028,7 @@
                         </a:rPr>
                         <a:t>完成时间</a:t>
                       </a:r>
-                      <a:endParaRPr lang="en-US" sz="1500" dirty="0">
+                      <a:endParaRPr lang="en-US" sz="1600" dirty="0">
                         <a:latin typeface="微软雅黑" charset="0"/>
                         <a:ea typeface="微软雅黑" charset="0"/>
                         <a:cs typeface="微软雅黑" charset="0"/>
@@ -4078,7 +4078,7 @@
                   </a:tcPr>
                 </a:tc>
               </a:tr>
-              <a:tr h="0">
+              <a:tr h="566928">
                 <a:tc>
                   <a:txBody>
                     <a:bodyPr/>
@@ -4088,7 +4088,7 @@
                         <a:buNone/>
                       </a:pPr>
                       <a:r>
-                        <a:rPr lang="en-US" sz="1500" dirty="0">
+                        <a:rPr lang="en-US" sz="1600" dirty="0">
                           <a:solidFill>
                             <a:srgbClr val="1F2328"/>
                           </a:solidFill>
@@ -4098,7 +4098,7 @@
                         </a:rPr>
                         <a:t>回款专项清收</a:t>
                       </a:r>
-                      <a:endParaRPr lang="en-US" sz="1500" dirty="0">
+                      <a:endParaRPr lang="en-US" sz="1600" dirty="0">
                         <a:latin typeface="微软雅黑" charset="0"/>
                         <a:ea typeface="微软雅黑" charset="0"/>
                         <a:cs typeface="微软雅黑" charset="0"/>
@@ -4156,7 +4156,7 @@
                         <a:buNone/>
                       </a:pPr>
                       <a:r>
-                        <a:rPr lang="en-US" sz="1500" dirty="0">
+                        <a:rPr lang="en-US" sz="1600" dirty="0">
                           <a:solidFill>
                             <a:srgbClr val="1F2328"/>
                           </a:solidFill>
@@ -4170,7 +4170,7 @@
                         <a:buNone/>
                       </a:pPr>
                       <a:r>
-                        <a:rPr lang="en-US" sz="1500" dirty="0">
+                        <a:rPr lang="en-US" sz="1600" dirty="0">
                           <a:solidFill>
                             <a:srgbClr val="1F2328"/>
                           </a:solidFill>
@@ -4184,7 +4184,7 @@
                         <a:buNone/>
                       </a:pPr>
                       <a:r>
-                        <a:rPr lang="en-US" sz="1500" dirty="0">
+                        <a:rPr lang="en-US" sz="1600" dirty="0">
                           <a:solidFill>
                             <a:srgbClr val="1F2328"/>
                           </a:solidFill>
@@ -4194,7 +4194,7 @@
                         </a:rPr>
                         <a:t>天</a:t>
                       </a:r>
-                      <a:endParaRPr lang="en-US" sz="1500" dirty="0">
+                      <a:endParaRPr lang="en-US" sz="1600" dirty="0">
                         <a:latin typeface="微软雅黑" charset="0"/>
                         <a:ea typeface="微软雅黑" charset="0"/>
                         <a:cs typeface="微软雅黑" charset="0"/>
@@ -4252,7 +4252,7 @@
                         <a:buNone/>
                       </a:pPr>
                       <a:r>
-                        <a:rPr lang="en-US" sz="1500" dirty="0">
+                        <a:rPr lang="en-US" sz="1600" dirty="0">
                           <a:solidFill>
                             <a:srgbClr val="1F2328"/>
                           </a:solidFill>
@@ -4262,7 +4262,7 @@
                         </a:rPr>
                         <a:t>王敏</a:t>
                       </a:r>
-                      <a:endParaRPr lang="en-US" sz="1500" dirty="0">
+                      <a:endParaRPr lang="en-US" sz="1600" dirty="0">
                         <a:latin typeface="微软雅黑" charset="0"/>
                         <a:ea typeface="微软雅黑" charset="0"/>
                         <a:cs typeface="微软雅黑" charset="0"/>
@@ -4320,7 +4320,7 @@
                         <a:buNone/>
                       </a:pPr>
                       <a:r>
-                        <a:rPr lang="en-US" sz="1500" dirty="0">
+                        <a:rPr lang="en-US" sz="1600" dirty="0">
                           <a:solidFill>
                             <a:srgbClr val="1F2328"/>
                           </a:solidFill>
@@ -4334,7 +4334,7 @@
                         <a:buNone/>
                       </a:pPr>
                       <a:r>
-                        <a:rPr lang="en-US" sz="1500" dirty="0">
+                        <a:rPr lang="en-US" sz="1600" dirty="0">
                           <a:solidFill>
                             <a:srgbClr val="1F2328"/>
                           </a:solidFill>
@@ -4348,7 +4348,7 @@
                         <a:buNone/>
                       </a:pPr>
                       <a:r>
-                        <a:rPr lang="en-US" sz="1500" dirty="0">
+                        <a:rPr lang="en-US" sz="1600" dirty="0">
                           <a:solidFill>
                             <a:srgbClr val="1F2328"/>
                           </a:solidFill>
@@ -4362,7 +4362,7 @@
                         <a:buNone/>
                       </a:pPr>
                       <a:r>
-                        <a:rPr lang="en-US" sz="1500" dirty="0">
+                        <a:rPr lang="en-US" sz="1600" dirty="0">
                           <a:solidFill>
                             <a:srgbClr val="1F2328"/>
                           </a:solidFill>
@@ -4372,7 +4372,7 @@
                         </a:rPr>
                         <a:t>日</a:t>
                       </a:r>
-                      <a:endParaRPr lang="en-US" sz="1500" dirty="0">
+                      <a:endParaRPr lang="en-US" sz="1600" dirty="0">
                         <a:latin typeface="微软雅黑" charset="0"/>
                         <a:ea typeface="微软雅黑" charset="0"/>
                         <a:cs typeface="微软雅黑" charset="0"/>
@@ -4422,7 +4422,7 @@
                   </a:tcPr>
                 </a:tc>
               </a:tr>
-              <a:tr h="0">
+              <a:tr h="566928">
                 <a:tc>
                   <a:txBody>
                     <a:bodyPr/>
@@ -4432,7 +4432,7 @@
                         <a:buNone/>
                       </a:pPr>
                       <a:r>
-                        <a:rPr lang="en-US" sz="1500" dirty="0">
+                        <a:rPr lang="en-US" sz="1600" dirty="0">
                           <a:solidFill>
                             <a:srgbClr val="1F2328"/>
                           </a:solidFill>
@@ -4442,7 +4442,7 @@
                         </a:rPr>
                         <a:t>智能终端推广</a:t>
                       </a:r>
-                      <a:endParaRPr lang="en-US" sz="1500" dirty="0">
+                      <a:endParaRPr lang="en-US" sz="1600" dirty="0">
                         <a:latin typeface="微软雅黑" charset="0"/>
                         <a:ea typeface="微软雅黑" charset="0"/>
                         <a:cs typeface="微软雅黑" charset="0"/>
@@ -4500,7 +4500,7 @@
                         <a:buNone/>
                       </a:pPr>
                       <a:r>
-                        <a:rPr lang="en-US" sz="1500" dirty="0">
+                        <a:rPr lang="en-US" sz="1600" dirty="0">
                           <a:solidFill>
                             <a:srgbClr val="1F2328"/>
                           </a:solidFill>
@@ -4514,7 +4514,7 @@
                         <a:buNone/>
                       </a:pPr>
                       <a:r>
-                        <a:rPr lang="en-US" sz="1500" dirty="0">
+                        <a:rPr lang="en-US" sz="1600" dirty="0">
                           <a:solidFill>
                             <a:srgbClr val="1F2328"/>
                           </a:solidFill>
@@ -4528,7 +4528,7 @@
                         <a:buNone/>
                       </a:pPr>
                       <a:r>
-                        <a:rPr lang="en-US" sz="1500" dirty="0">
+                        <a:rPr lang="en-US" sz="1600" dirty="0">
                           <a:solidFill>
                             <a:srgbClr val="1F2328"/>
                           </a:solidFill>
@@ -4538,7 +4538,7 @@
                         </a:rPr>
                         <a:t>万元</a:t>
                       </a:r>
-                      <a:endParaRPr lang="en-US" sz="1500" dirty="0">
+                      <a:endParaRPr lang="en-US" sz="1600" dirty="0">
                         <a:latin typeface="微软雅黑" charset="0"/>
                         <a:ea typeface="微软雅黑" charset="0"/>
                         <a:cs typeface="微软雅黑" charset="0"/>
@@ -4596,7 +4596,7 @@
                         <a:buNone/>
                       </a:pPr>
                       <a:r>
-                        <a:rPr lang="en-US" sz="1500" dirty="0">
+                        <a:rPr lang="en-US" sz="1600" dirty="0">
                           <a:solidFill>
                             <a:srgbClr val="1F2328"/>
                           </a:solidFill>
@@ -4606,7 +4606,7 @@
                         </a:rPr>
                         <a:t>李强</a:t>
                       </a:r>
-                      <a:endParaRPr lang="en-US" sz="1500" dirty="0">
+                      <a:endParaRPr lang="en-US" sz="1600" dirty="0">
                         <a:latin typeface="微软雅黑" charset="0"/>
                         <a:ea typeface="微软雅黑" charset="0"/>
                         <a:cs typeface="微软雅黑" charset="0"/>
@@ -4664,7 +4664,7 @@
                         <a:buNone/>
                       </a:pPr>
                       <a:r>
-                        <a:rPr lang="en-US" sz="1500" dirty="0">
+                        <a:rPr lang="en-US" sz="1600" dirty="0">
                           <a:solidFill>
                             <a:srgbClr val="1F2328"/>
                           </a:solidFill>
@@ -4678,7 +4678,7 @@
                         <a:buNone/>
                       </a:pPr>
                       <a:r>
-                        <a:rPr lang="en-US" sz="1500" dirty="0">
+                        <a:rPr lang="en-US" sz="1600" dirty="0">
                           <a:solidFill>
                             <a:srgbClr val="1F2328"/>
                           </a:solidFill>
@@ -4692,7 +4692,7 @@
                         <a:buNone/>
                       </a:pPr>
                       <a:r>
-                        <a:rPr lang="en-US" sz="1500" dirty="0">
+                        <a:rPr lang="en-US" sz="1600" dirty="0">
                           <a:solidFill>
                             <a:srgbClr val="1F2328"/>
                           </a:solidFill>
@@ -4706,7 +4706,7 @@
                         <a:buNone/>
                       </a:pPr>
                       <a:r>
-                        <a:rPr lang="en-US" sz="1500" dirty="0">
+                        <a:rPr lang="en-US" sz="1600" dirty="0">
                           <a:solidFill>
                             <a:srgbClr val="1F2328"/>
                           </a:solidFill>
@@ -4716,7 +4716,7 @@
                         </a:rPr>
                         <a:t>日</a:t>
                       </a:r>
-                      <a:endParaRPr lang="en-US" sz="1500" dirty="0">
+                      <a:endParaRPr lang="en-US" sz="1600" dirty="0">
                         <a:latin typeface="微软雅黑" charset="0"/>
                         <a:ea typeface="微软雅黑" charset="0"/>
                         <a:cs typeface="微软雅黑" charset="0"/>

--- a/docs/samples/经营汇报.pptx
+++ b/docs/samples/经营汇报.pptx
@@ -2065,7 +2065,7 @@
                 <a:ea typeface="微软雅黑" pitchFamily="34" charset="-122"/>
                 <a:cs typeface="微软雅黑" pitchFamily="34" charset="-120"/>
               </a:rPr>
-              <a:t>2026 年 10 月 14 日</a:t>
+              <a:t>2026 年 10 月 15 日</a:t>
             </a:r>
             <a:endParaRPr lang="en-US" sz="1400" dirty="0"/>
           </a:p>

--- a/docs/samples/经营汇报.pptx
+++ b/docs/samples/经营汇报.pptx
@@ -2805,18 +2805,20 @@
           <a:ln/>
         </p:spPr>
         <p:txBody>
-          <a:bodyPr wrap="square" rtlCol="0" anchor="t"/>
+          <a:bodyPr wrap="square" rtlCol="0" anchor="t">
+            <a:normAutofit/>
+          </a:bodyPr>
           <a:lstStyle/>
           <a:p>
-            <a:pPr marL="342900" indent="-342900">
+            <a:pPr marL="254000" indent="-254000">
               <a:spcAft>
-                <a:spcPts val="800"/>
+                <a:spcPts val="1000"/>
               </a:spcAft>
               <a:buSzPct val="100000"/>
               <a:buChar char="■"/>
             </a:pPr>
             <a:r>
-              <a:rPr lang="en-US" sz="1600" dirty="0">
+              <a:rPr lang="en-US" sz="1500" dirty="0">
                 <a:solidFill>
                   <a:srgbClr val="1F2328"/>
                 </a:solidFill>
@@ -2826,7 +2828,7 @@
               </a:rPr>
               <a:t>华东同比增长 22%，华北略有下滑</a:t>
             </a:r>
-            <a:endParaRPr lang="en-US" sz="1600" dirty="0"/>
+            <a:endParaRPr lang="en-US" sz="1500" dirty="0"/>
           </a:p>
         </p:txBody>
       </p:sp>
@@ -3021,7 +3023,7 @@
               <a:buChar char="■"/>
             </a:pPr>
             <a:r>
-              <a:rPr lang="en-US" sz="2200" dirty="0">
+              <a:rPr lang="en-US" sz="2600" dirty="0">
                 <a:solidFill>
                   <a:srgbClr val="1F2328"/>
                 </a:solidFill>
@@ -3031,7 +3033,7 @@
               </a:rPr>
               <a:t>签约 3 家年框客户，合同总额 380 万元</a:t>
             </a:r>
-            <a:endParaRPr lang="en-US" sz="2200" dirty="0"/>
+            <a:endParaRPr lang="en-US" sz="2600" dirty="0"/>
           </a:p>
           <a:p>
             <a:pPr marL="330200" indent="-330200">
@@ -3039,13 +3041,13 @@
                 <a:spcPct val="115000"/>
               </a:lnSpc>
               <a:spcBef>
-                <a:spcPts val="1300"/>
+                <a:spcPts val="1600"/>
               </a:spcBef>
               <a:buSzPct val="100000"/>
               <a:buChar char="■"/>
             </a:pPr>
             <a:r>
-              <a:rPr lang="en-US" sz="2200" dirty="0">
+              <a:rPr lang="en-US" sz="2600" dirty="0">
                 <a:solidFill>
                   <a:srgbClr val="1F2328"/>
                 </a:solidFill>
@@ -3055,7 +3057,7 @@
               </a:rPr>
               <a:t>新增区域代理 6 家，覆盖 4 个新城市</a:t>
             </a:r>
-            <a:endParaRPr lang="en-US" sz="2200" dirty="0"/>
+            <a:endParaRPr lang="en-US" sz="2600" dirty="0"/>
           </a:p>
           <a:p>
             <a:pPr marL="330200" indent="-330200">
@@ -3063,13 +3065,13 @@
                 <a:spcPct val="115000"/>
               </a:lnSpc>
               <a:spcBef>
-                <a:spcPts val="1300"/>
+                <a:spcPts val="1600"/>
               </a:spcBef>
               <a:buSzPct val="100000"/>
               <a:buChar char="■"/>
             </a:pPr>
             <a:r>
-              <a:rPr lang="en-US" sz="2200" dirty="0">
+              <a:rPr lang="en-US" sz="2600" dirty="0">
                 <a:solidFill>
                   <a:srgbClr val="1F2328"/>
                 </a:solidFill>
@@ -3079,7 +3081,7 @@
               </a:rPr>
               <a:t>智能终端产品线上市</a:t>
             </a:r>
-            <a:endParaRPr lang="en-US" sz="2200" dirty="0"/>
+            <a:endParaRPr lang="en-US" sz="2600" dirty="0"/>
           </a:p>
           <a:p>
             <a:pPr lvl="1" marL="660400" indent="-330200">
@@ -3090,7 +3092,7 @@
               <a:buChar char="•"/>
             </a:pPr>
             <a:r>
-              <a:rPr lang="en-US" sz="1800" dirty="0">
+              <a:rPr lang="en-US" sz="2200" dirty="0">
                 <a:solidFill>
                   <a:srgbClr val="595959"/>
                 </a:solidFill>
@@ -3100,7 +3102,7 @@
               </a:rPr>
               <a:t>完成目标的 64%，需加强推广</a:t>
             </a:r>
-            <a:endParaRPr lang="en-US" sz="2200" dirty="0"/>
+            <a:endParaRPr lang="en-US" sz="2600" dirty="0"/>
           </a:p>
         </p:txBody>
       </p:sp>
@@ -3799,12 +3801,12 @@
             <a:tbl>
               <a:tblPr/>
               <a:tblGrid>
-                <a:gridCol w="2773604"/>
-                <a:gridCol w="2773604"/>
-                <a:gridCol w="2773604"/>
-                <a:gridCol w="2773604"/>
+                <a:gridCol w="2218883"/>
+                <a:gridCol w="4067952"/>
+                <a:gridCol w="1479255"/>
+                <a:gridCol w="3328325"/>
               </a:tblGrid>
-              <a:tr h="566928">
+              <a:tr h="685800">
                 <a:tc>
                   <a:txBody>
                     <a:bodyPr/>
@@ -4078,7 +4080,7 @@
                   </a:tcPr>
                 </a:tc>
               </a:tr>
-              <a:tr h="566928">
+              <a:tr h="685800">
                 <a:tc>
                   <a:txBody>
                     <a:bodyPr/>
@@ -4422,7 +4424,7 @@
                   </a:tcPr>
                 </a:tc>
               </a:tr>
-              <a:tr h="566928">
+              <a:tr h="685800">
                 <a:tc>
                   <a:txBody>
                     <a:bodyPr/>
